--- a/base_ppt/base_output/1.3_工作流编排与对话状态管理.pptx
+++ b/base_ppt/base_output/1.3_工作流编排与对话状态管理.pptx
@@ -16136,28 +16136,14 @@
                 <a:latin typeface="Arial" panose="020B0604020202020204" pitchFamily="34" charset="0"/>
                 <a:cs typeface="Arial" panose="020B0604020202020204" pitchFamily="34" charset="0"/>
               </a:rPr>
-              <a:t>Agent</a:t>
+              <a:t>Agent </a:t>
             </a:r>
             <a:r>
               <a:rPr lang="zh-CN" altLang="en-US" dirty="0">
                 <a:latin typeface="Arial" panose="020B0604020202020204" pitchFamily="34" charset="0"/>
                 <a:cs typeface="Arial" panose="020B0604020202020204" pitchFamily="34" charset="0"/>
               </a:rPr>
-              <a:t>的稳定性，不只来自模型，也来自节点职责是否清晰、变量传递是否准确、控制流是否合理、记忆管理是否克制。本任务解决的问题是</a:t>
-            </a:r>
-            <a:r>
-              <a:rPr lang="en-US" altLang="zh-CN" dirty="0">
-                <a:latin typeface="Arial" panose="020B0604020202020204" pitchFamily="34" charset="0"/>
-                <a:cs typeface="Arial" panose="020B0604020202020204" pitchFamily="34" charset="0"/>
-              </a:rPr>
-              <a:t>Agent</a:t>
-            </a:r>
-            <a:r>
-              <a:rPr lang="zh-CN" altLang="en-US" dirty="0">
-                <a:latin typeface="Arial" panose="020B0604020202020204" pitchFamily="34" charset="0"/>
-                <a:cs typeface="Arial" panose="020B0604020202020204" pitchFamily="34" charset="0"/>
-              </a:rPr>
-              <a:t>如何在系统里按流程做。</a:t>
+              <a:t>的稳定性，不只来自模型，也来自节点职责是否清晰、变量传递是否准确、控制流是否合理、记忆管理是否克制。</a:t>
             </a:r>
             <a:endParaRPr lang="zh-CN" altLang="en-US" dirty="0">
               <a:latin typeface="Arial" panose="020B0604020202020204" pitchFamily="34" charset="0"/>
@@ -16737,36 +16723,13 @@
               <a:buChar char="Ø"/>
             </a:pPr>
             <a:r>
-              <a:rPr lang="en-US" sz="2000" dirty="0">
+              <a:rPr lang="zh-CN" sz="2000" dirty="0">
                 <a:latin typeface="Arial" panose="020B0604020202020204" pitchFamily="34" charset="0"/>
-                <a:cs typeface="Arial" panose="020B0604020202020204" pitchFamily="34" charset="0"/>
               </a:rPr>
-              <a:t>Prompt</a:t>
+              <a:t>节点职责清晰；</a:t>
             </a:r>
-            <a:r>
-              <a:rPr lang="zh-CN" altLang="en-US" sz="2000" dirty="0">
-                <a:latin typeface="Arial" panose="020B0604020202020204" pitchFamily="34" charset="0"/>
-                <a:cs typeface="Arial" panose="020B0604020202020204" pitchFamily="34" charset="0"/>
-              </a:rPr>
-              <a:t>决定单点行为，</a:t>
-            </a:r>
-            <a:r>
-              <a:rPr lang="en-US" altLang="zh-CN" sz="2000" dirty="0">
-                <a:latin typeface="Arial" panose="020B0604020202020204" pitchFamily="34" charset="0"/>
-                <a:cs typeface="Arial" panose="020B0604020202020204" pitchFamily="34" charset="0"/>
-              </a:rPr>
-              <a:t>Workflow</a:t>
-            </a:r>
-            <a:r>
-              <a:rPr lang="zh-CN" altLang="en-US" sz="2000" dirty="0">
-                <a:latin typeface="Arial" panose="020B0604020202020204" pitchFamily="34" charset="0"/>
-                <a:cs typeface="Arial" panose="020B0604020202020204" pitchFamily="34" charset="0"/>
-              </a:rPr>
-              <a:t>决定系统执行</a:t>
-            </a:r>
-            <a:endParaRPr lang="zh-CN" altLang="en-US" sz="2000" dirty="0">
+            <a:endParaRPr lang="zh-CN" sz="2000" dirty="0">
               <a:latin typeface="Arial" panose="020B0604020202020204" pitchFamily="34" charset="0"/>
-              <a:cs typeface="Arial" panose="020B0604020202020204" pitchFamily="34" charset="0"/>
             </a:endParaRPr>
           </a:p>
         </p:txBody>
@@ -16804,7 +16767,7 @@
                 <a:latin typeface="Arial" panose="020B0604020202020204" pitchFamily="34" charset="0"/>
                 <a:sym typeface="+mn-ea"/>
               </a:rPr>
-              <a:t>从提示词调优思维过渡到系统编排思维</a:t>
+              <a:t>从提示词思维转向系统编排思维；</a:t>
             </a:r>
             <a:endParaRPr lang="zh-CN" sz="2000" dirty="0">
               <a:latin typeface="Arial" panose="020B0604020202020204" pitchFamily="34" charset="0"/>
@@ -16845,7 +16808,7 @@
               <a:rPr lang="zh-CN" sz="2000" dirty="0">
                 <a:latin typeface="Arial" panose="020B0604020202020204" pitchFamily="34" charset="0"/>
               </a:rPr>
-              <a:t>变量是工作流的数据血管，不是随手写的占位符</a:t>
+              <a:t>变量契约明确；</a:t>
             </a:r>
             <a:endParaRPr lang="zh-CN" sz="2000" dirty="0">
               <a:latin typeface="Arial" panose="020B0604020202020204" pitchFamily="34" charset="0"/>
@@ -16882,22 +16845,13 @@
               <a:buChar char="Ø"/>
             </a:pPr>
             <a:r>
-              <a:rPr lang="en-US" sz="2000" dirty="0">
+              <a:rPr lang="zh-CN" sz="2000" dirty="0">
                 <a:latin typeface="Arial" panose="020B0604020202020204" pitchFamily="34" charset="0"/>
-                <a:cs typeface="Arial" panose="020B0604020202020204" pitchFamily="34" charset="0"/>
               </a:rPr>
-              <a:t>Chatflow</a:t>
+              <a:t>控制逻辑稳定；</a:t>
             </a:r>
-            <a:r>
-              <a:rPr lang="zh-CN" altLang="en-US" sz="2000" dirty="0">
-                <a:latin typeface="Arial" panose="020B0604020202020204" pitchFamily="34" charset="0"/>
-                <a:cs typeface="Arial" panose="020B0604020202020204" pitchFamily="34" charset="0"/>
-              </a:rPr>
-              <a:t>的关键价值在于把会话状态纳入系统设计</a:t>
-            </a:r>
-            <a:endParaRPr lang="zh-CN" altLang="en-US" sz="2000" dirty="0">
+            <a:endParaRPr lang="zh-CN" sz="2000" dirty="0">
               <a:latin typeface="Arial" panose="020B0604020202020204" pitchFamily="34" charset="0"/>
-              <a:cs typeface="Arial" panose="020B0604020202020204" pitchFamily="34" charset="0"/>
             </a:endParaRPr>
           </a:p>
         </p:txBody>
@@ -16935,7 +16889,7 @@
                 <a:latin typeface="Arial" panose="020B0604020202020204" pitchFamily="34" charset="0"/>
                 <a:sym typeface="+mn-ea"/>
               </a:rPr>
-              <a:t>真正理解变量、上下文、分支和记忆的联动关系</a:t>
+              <a:t>理解变量、上下文、分支和记忆联动关系；</a:t>
             </a:r>
             <a:endParaRPr lang="zh-CN" sz="2000" dirty="0">
               <a:latin typeface="Arial" panose="020B0604020202020204" pitchFamily="34" charset="0"/>
@@ -16975,12 +16929,46 @@
             <a:r>
               <a:rPr lang="zh-CN" sz="2000" dirty="0">
                 <a:latin typeface="Arial" panose="020B0604020202020204" pitchFamily="34" charset="0"/>
+                <a:cs typeface="Arial" panose="020B0604020202020204" pitchFamily="34" charset="0"/>
                 <a:sym typeface="+mn-ea"/>
               </a:rPr>
-              <a:t>掌握节点编排与变量传递的基本方法</a:t>
+              <a:t>区分</a:t>
             </a:r>
-            <a:endParaRPr lang="zh-CN" sz="2000" dirty="0">
+            <a:r>
+              <a:rPr lang="en-US" altLang="zh-CN" sz="2000" dirty="0">
+                <a:latin typeface="Arial" panose="020B0604020202020204" pitchFamily="34" charset="0"/>
+                <a:cs typeface="Arial" panose="020B0604020202020204" pitchFamily="34" charset="0"/>
+                <a:sym typeface="+mn-ea"/>
+              </a:rPr>
+              <a:t>Workflow</a:t>
+            </a:r>
+            <a:r>
+              <a:rPr lang="zh-CN" altLang="en-US" sz="2000" dirty="0">
+                <a:latin typeface="Arial" panose="020B0604020202020204" pitchFamily="34" charset="0"/>
+                <a:cs typeface="Arial" panose="020B0604020202020204" pitchFamily="34" charset="0"/>
+                <a:sym typeface="+mn-ea"/>
+              </a:rPr>
+              <a:t>与</a:t>
+            </a:r>
+            <a:r>
+              <a:rPr lang="en-US" altLang="zh-CN" sz="2000" dirty="0">
+                <a:latin typeface="Arial" panose="020B0604020202020204" pitchFamily="34" charset="0"/>
+                <a:cs typeface="Arial" panose="020B0604020202020204" pitchFamily="34" charset="0"/>
+                <a:sym typeface="+mn-ea"/>
+              </a:rPr>
+              <a:t>Chatflow</a:t>
+            </a:r>
+            <a:r>
+              <a:rPr lang="zh-CN" altLang="en-US" sz="2000" dirty="0">
+                <a:latin typeface="Arial" panose="020B0604020202020204" pitchFamily="34" charset="0"/>
+                <a:cs typeface="Arial" panose="020B0604020202020204" pitchFamily="34" charset="0"/>
+                <a:sym typeface="+mn-ea"/>
+              </a:rPr>
+              <a:t>及会话</a:t>
+            </a:r>
+            <a:endParaRPr lang="zh-CN" altLang="en-US" sz="2000" dirty="0">
               <a:latin typeface="Arial" panose="020B0604020202020204" pitchFamily="34" charset="0"/>
+              <a:cs typeface="Arial" panose="020B0604020202020204" pitchFamily="34" charset="0"/>
               <a:sym typeface="+mn-ea"/>
             </a:endParaRPr>
           </a:p>
@@ -18757,7 +18745,7 @@
                 <a:cs typeface="微软雅黑" panose="020B0503020204020204" pitchFamily="34" charset="-122"/>
                 <a:sym typeface="+mn-ea"/>
               </a:rPr>
-              <a:t>Prompt</a:t>
+              <a:t> Prompt </a:t>
             </a:r>
             <a:r>
               <a:rPr lang="zh-CN" altLang="en-US" sz="2000" dirty="0">
@@ -18766,7 +18754,7 @@
                 <a:cs typeface="微软雅黑" panose="020B0503020204020204" pitchFamily="34" charset="-122"/>
                 <a:sym typeface="+mn-ea"/>
               </a:rPr>
-              <a:t>能不能完成？尝试一下构建。在这个案例中，哪些问题必须交给</a:t>
+              <a:t>能不能完成？尝试一下构建。</a:t>
             </a:r>
             <a:r>
               <a:rPr lang="en-US" altLang="zh-CN" sz="2000" dirty="0">
@@ -18775,7 +18763,8 @@
                 <a:cs typeface="微软雅黑" panose="020B0503020204020204" pitchFamily="34" charset="-122"/>
                 <a:sym typeface="+mn-ea"/>
               </a:rPr>
-              <a:t>LLM</a:t>
+              <a:t>
+</a:t>
             </a:r>
             <a:r>
               <a:rPr lang="zh-CN" altLang="en-US" sz="2000" dirty="0">
@@ -18784,7 +18773,44 @@
                 <a:cs typeface="微软雅黑" panose="020B0503020204020204" pitchFamily="34" charset="-122"/>
                 <a:sym typeface="+mn-ea"/>
               </a:rPr>
-              <a:t>，哪些问题其实更适合交给规则和模板？这个案例还有哪些部分可以进一步优化？</a:t>
+              <a:t>在这个案例中，哪些问题必须交给</a:t>
+            </a:r>
+            <a:r>
+              <a:rPr lang="en-US" altLang="zh-CN" sz="2000" dirty="0">
+                <a:latin typeface="微软雅黑" panose="020B0503020204020204" pitchFamily="34" charset="-122"/>
+                <a:ea typeface="微软雅黑" panose="020B0503020204020204" pitchFamily="34" charset="-122"/>
+                <a:cs typeface="微软雅黑" panose="020B0503020204020204" pitchFamily="34" charset="-122"/>
+                <a:sym typeface="+mn-ea"/>
+              </a:rPr>
+              <a:t> LLM</a:t>
+            </a:r>
+            <a:r>
+              <a:rPr lang="zh-CN" altLang="en-US" sz="2000" dirty="0">
+                <a:latin typeface="微软雅黑" panose="020B0503020204020204" pitchFamily="34" charset="-122"/>
+                <a:ea typeface="微软雅黑" panose="020B0503020204020204" pitchFamily="34" charset="-122"/>
+                <a:cs typeface="微软雅黑" panose="020B0503020204020204" pitchFamily="34" charset="-122"/>
+                <a:sym typeface="+mn-ea"/>
+              </a:rPr>
+              <a:t>，哪些问题其实更适合交给规则和模板？</a:t>
+            </a:r>
+            <a:r>
+              <a:rPr lang="en-US" altLang="zh-CN" sz="2000" dirty="0">
+                <a:latin typeface="微软雅黑" panose="020B0503020204020204" pitchFamily="34" charset="-122"/>
+                <a:ea typeface="微软雅黑" panose="020B0503020204020204" pitchFamily="34" charset="-122"/>
+                <a:cs typeface="微软雅黑" panose="020B0503020204020204" pitchFamily="34" charset="-122"/>
+                <a:sym typeface="+mn-ea"/>
+              </a:rPr>
+              <a:t>
+</a:t>
+            </a:r>
+            <a:r>
+              <a:rPr lang="zh-CN" altLang="en-US" sz="2000" dirty="0">
+                <a:latin typeface="微软雅黑" panose="020B0503020204020204" pitchFamily="34" charset="-122"/>
+                <a:ea typeface="微软雅黑" panose="020B0503020204020204" pitchFamily="34" charset="-122"/>
+                <a:cs typeface="微软雅黑" panose="020B0503020204020204" pitchFamily="34" charset="-122"/>
+                <a:sym typeface="+mn-ea"/>
+              </a:rPr>
+              <a:t>这个案例还有哪些部分可以进一步优化？</a:t>
             </a:r>
             <a:endParaRPr lang="zh-CN" altLang="en-US" sz="2000" dirty="0">
               <a:latin typeface="微软雅黑" panose="020B0503020204020204" pitchFamily="34" charset="-122"/>
@@ -18881,25 +18907,7 @@
                 <a:cs typeface="微软雅黑" panose="020B0503020204020204" pitchFamily="34" charset="-122"/>
                 <a:sym typeface="+mn-ea"/>
               </a:rPr>
-              <a:t>首先尝试用单一</a:t>
-            </a:r>
-            <a:r>
-              <a:rPr lang="en-US" altLang="zh-CN" sz="2000" dirty="0">
-                <a:latin typeface="微软雅黑" panose="020B0503020204020204" pitchFamily="34" charset="-122"/>
-                <a:ea typeface="微软雅黑" panose="020B0503020204020204" pitchFamily="34" charset="-122"/>
-                <a:cs typeface="微软雅黑" panose="020B0503020204020204" pitchFamily="34" charset="-122"/>
-                <a:sym typeface="+mn-ea"/>
-              </a:rPr>
-              <a:t>Prompt</a:t>
-            </a:r>
-            <a:r>
-              <a:rPr lang="zh-CN" altLang="en-US" sz="2000" dirty="0">
-                <a:latin typeface="微软雅黑" panose="020B0503020204020204" pitchFamily="34" charset="-122"/>
-                <a:ea typeface="微软雅黑" panose="020B0503020204020204" pitchFamily="34" charset="-122"/>
-                <a:cs typeface="微软雅黑" panose="020B0503020204020204" pitchFamily="34" charset="-122"/>
-                <a:sym typeface="+mn-ea"/>
-              </a:rPr>
-              <a:t>实现相同功能，对比工作流方案的效果差异。需要明确区分：语义理解、意图识别等模糊任务适合</a:t>
+              <a:t>通过明确节点职责、变量契约和控制逻辑来设计工作流，利用</a:t>
             </a:r>
             <a:r>
               <a:rPr lang="en-US" altLang="zh-CN" sz="2000" dirty="0">
@@ -18917,7 +18925,25 @@
                 <a:cs typeface="微软雅黑" panose="020B0503020204020204" pitchFamily="34" charset="-122"/>
                 <a:sym typeface="+mn-ea"/>
               </a:rPr>
-              <a:t>；规则明确的数据验证、条件判断、数值计算适合规则和模板；多轮对话的状态管理需要系统设计而非单纯依赖模型能力。优化方向可考虑槽位填充效率、历史记忆压缩、异常处理机制等方面。</a:t>
+              <a:t>处理语义理解，用</a:t>
+            </a:r>
+            <a:r>
+              <a:rPr lang="en-US" altLang="zh-CN" sz="2000" dirty="0">
+                <a:latin typeface="微软雅黑" panose="020B0503020204020204" pitchFamily="34" charset="-122"/>
+                <a:ea typeface="微软雅黑" panose="020B0503020204020204" pitchFamily="34" charset="-122"/>
+                <a:cs typeface="微软雅黑" panose="020B0503020204020204" pitchFamily="34" charset="-122"/>
+                <a:sym typeface="+mn-ea"/>
+              </a:rPr>
+              <a:t>IF/ELSE</a:t>
+            </a:r>
+            <a:r>
+              <a:rPr lang="zh-CN" altLang="en-US" sz="2000" dirty="0">
+                <a:latin typeface="微软雅黑" panose="020B0503020204020204" pitchFamily="34" charset="-122"/>
+                <a:ea typeface="微软雅黑" panose="020B0503020204020204" pitchFamily="34" charset="-122"/>
+                <a:cs typeface="微软雅黑" panose="020B0503020204020204" pitchFamily="34" charset="-122"/>
+                <a:sym typeface="+mn-ea"/>
+              </a:rPr>
+              <a:t>等控制节点处理规则逻辑，并通过会话变量和记忆机制管理多轮对话状态。</a:t>
             </a:r>
             <a:endParaRPr lang="zh-CN" altLang="en-US" sz="2000" dirty="0">
               <a:latin typeface="微软雅黑" panose="020B0503020204020204" pitchFamily="34" charset="-122"/>
@@ -20076,8 +20102,8 @@
         </p:nvSpPr>
         <p:spPr>
           <a:xfrm>
-            <a:off x="389890" y="1929130"/>
-            <a:ext cx="6534785" cy="3415665"/>
+            <a:off x="389890" y="1715770"/>
+            <a:ext cx="6534785" cy="3629025"/>
           </a:xfrm>
           <a:prstGeom prst="rect">
             <a:avLst/>
@@ -20101,7 +20127,7 @@
                 <a:ea typeface="微软雅黑" panose="020B0503020204020204" pitchFamily="34" charset="-122"/>
                 <a:sym typeface="+mn-ea"/>
               </a:rPr>
-              <a:t>某物流分拣中心引入新系统，要求从固定流程操作转变为智能决策：系统需自动判断条码污损包裹的清洁处理、易碎品的缓降滑道分流，并根据实时车流调整分拣优先级，实现从传统自动化向智能化自动化的升级。</a:t>
+              <a:t>某物流分拣中心每天处理上万件包裹，现有系统按固定流程操作。经理想引入新系统，让系统自己判断处理条码污损、易碎品等异常情况，并能根据实时车流调整分拣优先级。</a:t>
             </a:r>
             <a:endParaRPr lang="zh-CN" altLang="zh-CN" dirty="0">
               <a:latin typeface="微软雅黑" panose="020B0503020204020204" pitchFamily="34" charset="-122"/>
@@ -20172,7 +20198,7 @@
                 <a:ea typeface="微软雅黑" panose="020B0503020204020204" pitchFamily="34" charset="-122"/>
                 <a:cs typeface="微软雅黑" panose="020B0503020204020204" pitchFamily="34" charset="-122"/>
               </a:rPr>
-              <a:t>传统自动化与智能化自动化的核心区别是什么</a:t>
+              <a:t>同样是自动化，工作流和智能体有什么区别？</a:t>
             </a:r>
             <a:r>
               <a:rPr lang="en-US" altLang="zh-CN" sz="2000" dirty="0">
@@ -20189,7 +20215,7 @@
                 <a:ea typeface="微软雅黑" panose="020B0503020204020204" pitchFamily="34" charset="-122"/>
                 <a:cs typeface="微软雅黑" panose="020B0503020204020204" pitchFamily="34" charset="-122"/>
               </a:rPr>
-              <a:t>新系统要稳定运行需要具备哪些关键功能</a:t>
+              <a:t>新系统需要具备什么功能才能在企业中稳定工作？</a:t>
             </a:r>
             <a:r>
               <a:rPr lang="en-US" altLang="zh-CN" sz="2000" dirty="0">
@@ -20206,7 +20232,7 @@
                 <a:ea typeface="微软雅黑" panose="020B0503020204020204" pitchFamily="34" charset="-122"/>
                 <a:cs typeface="微软雅黑" panose="020B0503020204020204" pitchFamily="34" charset="-122"/>
               </a:rPr>
-              <a:t>用自然语言给系统下指令需要包含哪些要素</a:t>
+              <a:t>如何用自己的话对系统下指令来实现经理的想法？</a:t>
             </a:r>
             <a:endParaRPr lang="zh-CN" altLang="en-US" sz="2000" dirty="0">
               <a:latin typeface="微软雅黑" panose="020B0503020204020204" pitchFamily="34" charset="-122"/>
@@ -22697,7 +22723,7 @@
                 <a:ea typeface="微软雅黑" panose="020B0503020204020204" pitchFamily="34" charset="-122"/>
                 <a:cs typeface="微软雅黑" panose="020B0503020204020204" pitchFamily="34" charset="-122"/>
               </a:rPr>
-              <a:t>Prompt”</a:t>
+              <a:t> Prompt”</a:t>
             </a:r>
             <a:r>
               <a:rPr lang="zh-CN" altLang="en-US" dirty="0" smtClean="0">
@@ -22745,7 +22771,7 @@
                 <a:ea typeface="微软雅黑" panose="020B0503020204020204" pitchFamily="34" charset="-122"/>
                 <a:cs typeface="微软雅黑" panose="020B0503020204020204" pitchFamily="34" charset="-122"/>
               </a:rPr>
-              <a:t>Workflow</a:t>
+              <a:t>Workflow </a:t>
             </a:r>
             <a:r>
               <a:rPr lang="zh-CN" altLang="en-US" dirty="0" smtClean="0">
@@ -22753,7 +22779,7 @@
                 <a:ea typeface="微软雅黑" panose="020B0503020204020204" pitchFamily="34" charset="-122"/>
                 <a:cs typeface="微软雅黑" panose="020B0503020204020204" pitchFamily="34" charset="-122"/>
               </a:rPr>
-              <a:t>）与对话流（</a:t>
+              <a:t>）与</a:t>
             </a:r>
             <a:r>
               <a:rPr lang="en-US" altLang="zh-CN" dirty="0" smtClean="0">
@@ -22761,7 +22787,23 @@
                 <a:ea typeface="微软雅黑" panose="020B0503020204020204" pitchFamily="34" charset="-122"/>
                 <a:cs typeface="微软雅黑" panose="020B0503020204020204" pitchFamily="34" charset="-122"/>
               </a:rPr>
-              <a:t>Chatflow</a:t>
+              <a:t> </a:t>
+            </a:r>
+            <a:r>
+              <a:rPr lang="zh-CN" altLang="en-US" dirty="0" smtClean="0">
+                <a:latin typeface="微软雅黑" panose="020B0503020204020204" pitchFamily="34" charset="-122"/>
+                <a:ea typeface="微软雅黑" panose="020B0503020204020204" pitchFamily="34" charset="-122"/>
+                <a:cs typeface="微软雅黑" panose="020B0503020204020204" pitchFamily="34" charset="-122"/>
+              </a:rPr>
+              <a:t>对话流（</a:t>
+            </a:r>
+            <a:r>
+              <a:rPr lang="en-US" altLang="zh-CN" dirty="0" smtClean="0">
+                <a:latin typeface="微软雅黑" panose="020B0503020204020204" pitchFamily="34" charset="-122"/>
+                <a:ea typeface="微软雅黑" panose="020B0503020204020204" pitchFamily="34" charset="-122"/>
+                <a:cs typeface="微软雅黑" panose="020B0503020204020204" pitchFamily="34" charset="-122"/>
+              </a:rPr>
+              <a:t>Chatflow </a:t>
             </a:r>
             <a:r>
               <a:rPr lang="zh-CN" altLang="en-US" dirty="0" smtClean="0">
@@ -23082,7 +23124,7 @@
                 <a:cs typeface="微软雅黑" panose="020B0503020204020204" pitchFamily="34" charset="-122"/>
                 <a:sym typeface="+mn-ea"/>
               </a:rPr>
-              <a:t>能够说清工作流中常见节点的作用、适用场景与配置要点</a:t>
+              <a:t>能够说清工作流中常见节点的作用、适用场景与配置要点；</a:t>
             </a:r>
             <a:endParaRPr lang="zh-CN" dirty="0">
               <a:latin typeface="微软雅黑" panose="020B0503020204020204" pitchFamily="34" charset="-122"/>
@@ -23128,27 +23170,9 @@
                 <a:cs typeface="微软雅黑" panose="020B0503020204020204" pitchFamily="34" charset="-122"/>
                 <a:sym typeface="+mn-ea"/>
               </a:rPr>
-              <a:t>能够理解变量在节点间的传递机制，并正确使用</a:t>
+              <a:t>理解变量传递机制，正确引用数据</a:t>
             </a:r>
-            <a:r>
-              <a:rPr lang="en-US" altLang="zh-CN" dirty="0">
-                <a:latin typeface="微软雅黑" panose="020B0503020204020204" pitchFamily="34" charset="-122"/>
-                <a:ea typeface="微软雅黑" panose="020B0503020204020204" pitchFamily="34" charset="-122"/>
-                <a:cs typeface="微软雅黑" panose="020B0503020204020204" pitchFamily="34" charset="-122"/>
-                <a:sym typeface="+mn-ea"/>
-              </a:rPr>
-              <a:t>{{variable}}</a:t>
-            </a:r>
-            <a:r>
-              <a:rPr lang="zh-CN" altLang="en-US" dirty="0">
-                <a:latin typeface="微软雅黑" panose="020B0503020204020204" pitchFamily="34" charset="-122"/>
-                <a:ea typeface="微软雅黑" panose="020B0503020204020204" pitchFamily="34" charset="-122"/>
-                <a:cs typeface="微软雅黑" panose="020B0503020204020204" pitchFamily="34" charset="-122"/>
-                <a:sym typeface="+mn-ea"/>
-              </a:rPr>
-              <a:t>引用数据</a:t>
-            </a:r>
-            <a:endParaRPr lang="zh-CN" altLang="en-US" dirty="0">
+            <a:endParaRPr lang="zh-CN" dirty="0">
               <a:latin typeface="微软雅黑" panose="020B0503020204020204" pitchFamily="34" charset="-122"/>
               <a:ea typeface="微软雅黑" panose="020B0503020204020204" pitchFamily="34" charset="-122"/>
               <a:cs typeface="微软雅黑" panose="020B0503020204020204" pitchFamily="34" charset="-122"/>
@@ -23192,7 +23216,7 @@
                 <a:cs typeface="微软雅黑" panose="020B0503020204020204" pitchFamily="34" charset="-122"/>
                 <a:sym typeface="+mn-ea"/>
               </a:rPr>
-              <a:t>能够区分</a:t>
+              <a:t>区分</a:t>
             </a:r>
             <a:r>
               <a:rPr lang="en-US" altLang="zh-CN" dirty="0">
@@ -23228,7 +23252,7 @@
                 <a:cs typeface="微软雅黑" panose="020B0503020204020204" pitchFamily="34" charset="-122"/>
                 <a:sym typeface="+mn-ea"/>
               </a:rPr>
-              <a:t>，理解多轮对话为什么必须引入会话状态与记忆机制</a:t>
+              <a:t>，理解会话记忆机制</a:t>
             </a:r>
             <a:endParaRPr lang="zh-CN" altLang="en-US" dirty="0">
               <a:latin typeface="微软雅黑" panose="020B0503020204020204" pitchFamily="34" charset="-122"/>
@@ -23274,7 +23298,7 @@
                 <a:cs typeface="微软雅黑" panose="020B0503020204020204" pitchFamily="34" charset="-122"/>
                 <a:sym typeface="+mn-ea"/>
               </a:rPr>
-              <a:t>能够设计一个具备意图识别、澄清补槽、上下文记忆和条件路由能力的对话型工作流</a:t>
+              <a:t>设计含意图识别、记忆与条件路由的对话工作流</a:t>
             </a:r>
             <a:endParaRPr lang="zh-CN" dirty="0">
               <a:latin typeface="微软雅黑" panose="020B0503020204020204" pitchFamily="34" charset="-122"/>
@@ -23320,7 +23344,7 @@
                 <a:cs typeface="微软雅黑" panose="020B0503020204020204" pitchFamily="34" charset="-122"/>
                 <a:sym typeface="+mn-ea"/>
               </a:rPr>
-              <a:t>能够搭建基础的提示词实验环境，并具备提示词版本管理意识</a:t>
+              <a:t>能够搭建基础的提示词实验环境，并具备提示词版本管理意识。</a:t>
             </a:r>
             <a:endParaRPr lang="zh-CN" dirty="0">
               <a:latin typeface="微软雅黑" panose="020B0503020204020204" pitchFamily="34" charset="-122"/>
@@ -26987,46 +27011,14 @@
             <a:r>
               <a:rPr lang="zh-CN" dirty="0" smtClean="0">
                 <a:latin typeface="Arial" panose="020B0604020202020204" pitchFamily="34" charset="0"/>
-                <a:cs typeface="Arial" panose="020B0604020202020204" pitchFamily="34" charset="0"/>
+                <a:cs typeface="Times New Roman" panose="02020603050405020304" charset="0"/>
                 <a:sym typeface="+mn-ea"/>
               </a:rPr>
-              <a:t>能围绕</a:t>
+              <a:t>能评估工作流设计的节点、变量和控制逻辑合理性</a:t>
             </a:r>
-            <a:r>
-              <a:rPr lang="en-US" altLang="zh-CN" dirty="0" smtClean="0">
-                <a:latin typeface="Arial" panose="020B0604020202020204" pitchFamily="34" charset="0"/>
-                <a:cs typeface="Arial" panose="020B0604020202020204" pitchFamily="34" charset="0"/>
-                <a:sym typeface="+mn-ea"/>
-              </a:rPr>
-              <a:t>“</a:t>
-            </a:r>
-            <a:r>
-              <a:rPr lang="zh-CN" altLang="en-US" dirty="0" smtClean="0">
-                <a:latin typeface="Arial" panose="020B0604020202020204" pitchFamily="34" charset="0"/>
-                <a:cs typeface="Arial" panose="020B0604020202020204" pitchFamily="34" charset="0"/>
-                <a:sym typeface="+mn-ea"/>
-              </a:rPr>
-              <a:t>节点职责清晰、变量契约明确、控制逻辑稳定</a:t>
-            </a:r>
-            <a:r>
-              <a:rPr lang="en-US" altLang="zh-CN" dirty="0" smtClean="0">
-                <a:latin typeface="Arial" panose="020B0604020202020204" pitchFamily="34" charset="0"/>
-                <a:cs typeface="Arial" panose="020B0604020202020204" pitchFamily="34" charset="0"/>
-                <a:sym typeface="+mn-ea"/>
-              </a:rPr>
-              <a:t>”</a:t>
-            </a:r>
-            <a:r>
-              <a:rPr lang="zh-CN" altLang="en-US" dirty="0" smtClean="0">
-                <a:latin typeface="Arial" panose="020B0604020202020204" pitchFamily="34" charset="0"/>
-                <a:cs typeface="Arial" panose="020B0604020202020204" pitchFamily="34" charset="0"/>
-                <a:sym typeface="+mn-ea"/>
-              </a:rPr>
-              <a:t>三个维度评估一个工作流设计是否合理</a:t>
-            </a:r>
-            <a:endParaRPr lang="zh-CN" altLang="en-US" dirty="0" smtClean="0">
+            <a:endParaRPr lang="zh-CN" dirty="0" smtClean="0">
               <a:latin typeface="Arial" panose="020B0604020202020204" pitchFamily="34" charset="0"/>
-              <a:cs typeface="Arial" panose="020B0604020202020204" pitchFamily="34" charset="0"/>
+              <a:cs typeface="Times New Roman" panose="02020603050405020304" charset="0"/>
               <a:sym typeface="+mn-ea"/>
             </a:endParaRPr>
           </a:p>
@@ -27066,7 +27058,7 @@
                 <a:cs typeface="Arial" panose="020B0604020202020204" pitchFamily="34" charset="0"/>
                 <a:sym typeface="+mn-ea"/>
               </a:rPr>
-              <a:t>能从系统编排视角理解</a:t>
+              <a:t>能从系统视角理解</a:t>
             </a:r>
             <a:r>
               <a:rPr lang="en-US" altLang="zh-CN" dirty="0" smtClean="0">
@@ -27082,7 +27074,7 @@
                 <a:cs typeface="Arial" panose="020B0604020202020204" pitchFamily="34" charset="0"/>
                 <a:sym typeface="+mn-ea"/>
               </a:rPr>
-              <a:t>，不再把大模型当作唯一能力中心</a:t>
+              <a:t>，不将大模型视为唯一能力中心</a:t>
             </a:r>
             <a:endParaRPr lang="zh-CN" altLang="en-US" dirty="0" smtClean="0">
               <a:latin typeface="Arial" panose="020B0604020202020204" pitchFamily="34" charset="0"/>
@@ -27142,7 +27134,7 @@
                 <a:cs typeface="Arial" panose="020B0604020202020204" pitchFamily="34" charset="0"/>
                 <a:sym typeface="+mn-ea"/>
               </a:rPr>
-              <a:t>中配置基础记忆机制，并实现简单的意图路由与多轮澄清闭环</a:t>
+              <a:t>中配置记忆机制，实现意图路由与多轮澄清</a:t>
             </a:r>
             <a:endParaRPr lang="zh-CN" altLang="en-US" dirty="0" smtClean="0">
               <a:latin typeface="Arial" panose="020B0604020202020204" pitchFamily="34" charset="0"/>
@@ -27180,17 +27172,9 @@
               <a:buFont typeface="Wingdings" panose="05000000000000000000" pitchFamily="2" charset="2"/>
               <a:buChar char="l"/>
             </a:pPr>
-            <a:r>
-              <a:rPr lang="zh-CN" dirty="0" smtClean="0">
-                <a:latin typeface="Arial" panose="020B0604020202020204" pitchFamily="34" charset="0"/>
-                <a:cs typeface="Times New Roman" panose="02020603050405020304" charset="0"/>
-                <a:sym typeface="+mn-ea"/>
-              </a:rPr>
-              <a:t>能说清工作流中常见节点的作用、适用场景与配置要点</a:t>
-            </a:r>
-            <a:endParaRPr lang="zh-CN" dirty="0" smtClean="0">
+            <a:endParaRPr lang="en-US" dirty="0" smtClean="0">
               <a:latin typeface="Arial" panose="020B0604020202020204" pitchFamily="34" charset="0"/>
-              <a:cs typeface="Times New Roman" panose="02020603050405020304" charset="0"/>
+              <a:cs typeface="Arial" panose="020B0604020202020204" pitchFamily="34" charset="0"/>
               <a:sym typeface="+mn-ea"/>
             </a:endParaRPr>
           </a:p>
@@ -27230,7 +27214,7 @@
                 <a:cs typeface="Times New Roman" panose="02020603050405020304" charset="0"/>
                 <a:sym typeface="+mn-ea"/>
               </a:rPr>
-              <a:t>重点：掌握节点编排、变量传递、控制流设计与对话状态管理的基本方法</a:t>
+              <a:t>重点：掌握节点编排、变量传递、控制流设计与对话状态管理的基本方法；</a:t>
             </a:r>
             <a:endParaRPr lang="zh-CN" altLang="en-US" dirty="0" smtClean="0">
               <a:latin typeface="Arial" panose="020B0604020202020204" pitchFamily="34" charset="0"/>
@@ -27271,30 +27255,14 @@
             <a:r>
               <a:rPr lang="zh-CN" altLang="en-US" dirty="0" smtClean="0">
                 <a:latin typeface="Arial" panose="020B0604020202020204" pitchFamily="34" charset="0"/>
-                <a:cs typeface="Arial" panose="020B0604020202020204" pitchFamily="34" charset="0"/>
+                <a:cs typeface="Times New Roman" panose="02020603050405020304" charset="0"/>
                 <a:sym typeface="+mn-ea"/>
               </a:rPr>
-              <a:t>难点：从提示词调优思维过渡到系统编排思维，真正理解变量、上下文、分支和记忆在</a:t>
-            </a:r>
-            <a:r>
-              <a:rPr lang="en-US" altLang="zh-CN" dirty="0" smtClean="0">
-                <a:latin typeface="Arial" panose="020B0604020202020204" pitchFamily="34" charset="0"/>
-                <a:cs typeface="Arial" panose="020B0604020202020204" pitchFamily="34" charset="0"/>
-                <a:sym typeface="+mn-ea"/>
-              </a:rPr>
-              <a:t>Agent</a:t>
-            </a:r>
-            <a:r>
-              <a:rPr lang="zh-CN" altLang="en-US" dirty="0" smtClean="0">
-                <a:latin typeface="Arial" panose="020B0604020202020204" pitchFamily="34" charset="0"/>
-                <a:cs typeface="Arial" panose="020B0604020202020204" pitchFamily="34" charset="0"/>
-                <a:sym typeface="+mn-ea"/>
-              </a:rPr>
-              <a:t>中的联动关系</a:t>
+              <a:t>难点：从提示词调优过渡到系统编排思维，理解变量与记忆联动</a:t>
             </a:r>
             <a:endParaRPr lang="zh-CN" altLang="en-US" dirty="0" smtClean="0">
               <a:latin typeface="Arial" panose="020B0604020202020204" pitchFamily="34" charset="0"/>
-              <a:cs typeface="Arial" panose="020B0604020202020204" pitchFamily="34" charset="0"/>
+              <a:cs typeface="Times New Roman" panose="02020603050405020304" charset="0"/>
               <a:sym typeface="+mn-ea"/>
             </a:endParaRPr>
           </a:p>

--- a/base_ppt/base_output/1.3_工作流编排与对话状态管理.pptx
+++ b/base_ppt/base_output/1.3_工作流编排与对话状态管理.pptx
@@ -16143,7 +16143,35 @@
                 <a:latin typeface="Arial" panose="020B0604020202020204" pitchFamily="34" charset="0"/>
                 <a:cs typeface="Arial" panose="020B0604020202020204" pitchFamily="34" charset="0"/>
               </a:rPr>
-              <a:t>的稳定性，不只来自模型，也来自节点职责是否清晰、变量传递是否准确、控制流是否合理、记忆管理是否克制。</a:t>
+              <a:t>的稳定性，不只来自模型，也来自节点职责是否清晰、变量传递是否准确、控制流是否合理、记忆管理是否克制。本任务解决的问题是</a:t>
+            </a:r>
+            <a:r>
+              <a:rPr lang="en-US" altLang="zh-CN" dirty="0">
+                <a:latin typeface="Arial" panose="020B0604020202020204" pitchFamily="34" charset="0"/>
+                <a:cs typeface="Arial" panose="020B0604020202020204" pitchFamily="34" charset="0"/>
+              </a:rPr>
+              <a:t>“Agent </a:t>
+            </a:r>
+            <a:r>
+              <a:rPr lang="zh-CN" altLang="en-US" dirty="0">
+                <a:latin typeface="Arial" panose="020B0604020202020204" pitchFamily="34" charset="0"/>
+                <a:cs typeface="Arial" panose="020B0604020202020204" pitchFamily="34" charset="0"/>
+              </a:rPr>
+              <a:t>如何在系统里按流程做</a:t>
+            </a:r>
+            <a:r>
+              <a:rPr lang="en-US" altLang="zh-CN" dirty="0">
+                <a:latin typeface="Arial" panose="020B0604020202020204" pitchFamily="34" charset="0"/>
+                <a:cs typeface="Arial" panose="020B0604020202020204" pitchFamily="34" charset="0"/>
+              </a:rPr>
+              <a:t>”</a:t>
+            </a:r>
+            <a:r>
+              <a:rPr lang="zh-CN" altLang="en-US" dirty="0">
+                <a:latin typeface="Arial" panose="020B0604020202020204" pitchFamily="34" charset="0"/>
+                <a:cs typeface="Arial" panose="020B0604020202020204" pitchFamily="34" charset="0"/>
+              </a:rPr>
+              <a:t>。</a:t>
             </a:r>
             <a:endParaRPr lang="zh-CN" altLang="en-US" dirty="0">
               <a:latin typeface="Arial" panose="020B0604020202020204" pitchFamily="34" charset="0"/>
@@ -16726,7 +16754,7 @@
               <a:rPr lang="zh-CN" sz="2000" dirty="0">
                 <a:latin typeface="Arial" panose="020B0604020202020204" pitchFamily="34" charset="0"/>
               </a:rPr>
-              <a:t>节点职责清晰；</a:t>
+              <a:t>节点职责清晰是工作流稳定的基础；</a:t>
             </a:r>
             <a:endParaRPr lang="zh-CN" sz="2000" dirty="0">
               <a:latin typeface="Arial" panose="020B0604020202020204" pitchFamily="34" charset="0"/>
@@ -16767,7 +16795,7 @@
                 <a:latin typeface="Arial" panose="020B0604020202020204" pitchFamily="34" charset="0"/>
                 <a:sym typeface="+mn-ea"/>
               </a:rPr>
-              <a:t>从提示词思维转向系统编排思维；</a:t>
+              <a:t>从提示词调优思维过渡到系统编排思维；</a:t>
             </a:r>
             <a:endParaRPr lang="zh-CN" sz="2000" dirty="0">
               <a:latin typeface="Arial" panose="020B0604020202020204" pitchFamily="34" charset="0"/>
@@ -16808,7 +16836,7 @@
               <a:rPr lang="zh-CN" sz="2000" dirty="0">
                 <a:latin typeface="Arial" panose="020B0604020202020204" pitchFamily="34" charset="0"/>
               </a:rPr>
-              <a:t>变量契约明确；</a:t>
+              <a:t>变量契约明确确保数据传递正确；</a:t>
             </a:r>
             <a:endParaRPr lang="zh-CN" sz="2000" dirty="0">
               <a:latin typeface="Arial" panose="020B0604020202020204" pitchFamily="34" charset="0"/>
@@ -16848,7 +16876,7 @@
               <a:rPr lang="zh-CN" sz="2000" dirty="0">
                 <a:latin typeface="Arial" panose="020B0604020202020204" pitchFamily="34" charset="0"/>
               </a:rPr>
-              <a:t>控制逻辑稳定；</a:t>
+              <a:t>控制逻辑稳定和记忆管理克制是关键；</a:t>
             </a:r>
             <a:endParaRPr lang="zh-CN" sz="2000" dirty="0">
               <a:latin typeface="Arial" panose="020B0604020202020204" pitchFamily="34" charset="0"/>
@@ -16887,12 +16915,30 @@
             <a:r>
               <a:rPr lang="zh-CN" sz="2000" dirty="0">
                 <a:latin typeface="Arial" panose="020B0604020202020204" pitchFamily="34" charset="0"/>
+                <a:cs typeface="Arial" panose="020B0604020202020204" pitchFamily="34" charset="0"/>
                 <a:sym typeface="+mn-ea"/>
               </a:rPr>
-              <a:t>理解变量、上下文、分支和记忆联动关系；</a:t>
+              <a:t>理解</a:t>
             </a:r>
-            <a:endParaRPr lang="zh-CN" sz="2000" dirty="0">
+            <a:r>
+              <a:rPr lang="en-US" altLang="zh-CN" sz="2000" dirty="0">
+                <a:latin typeface="Arial" panose="020B0604020202020204" pitchFamily="34" charset="0"/>
+                <a:cs typeface="Arial" panose="020B0604020202020204" pitchFamily="34" charset="0"/>
+                <a:sym typeface="+mn-ea"/>
+              </a:rPr>
+              <a:t>Agent</a:t>
+            </a:r>
+            <a:r>
+              <a:rPr lang="zh-CN" altLang="en-US" sz="2000" dirty="0">
+                <a:latin typeface="Arial" panose="020B0604020202020204" pitchFamily="34" charset="0"/>
+                <a:cs typeface="Arial" panose="020B0604020202020204" pitchFamily="34" charset="0"/>
+                <a:sym typeface="+mn-ea"/>
+              </a:rPr>
+              <a:t>各要素的联动关系</a:t>
+            </a:r>
+            <a:endParaRPr lang="zh-CN" altLang="en-US" sz="2000" dirty="0">
               <a:latin typeface="Arial" panose="020B0604020202020204" pitchFamily="34" charset="0"/>
+              <a:cs typeface="Arial" panose="020B0604020202020204" pitchFamily="34" charset="0"/>
               <a:sym typeface="+mn-ea"/>
             </a:endParaRPr>
           </a:p>
@@ -16958,15 +17004,7 @@
               </a:rPr>
               <a:t>Chatflow</a:t>
             </a:r>
-            <a:r>
-              <a:rPr lang="zh-CN" altLang="en-US" sz="2000" dirty="0">
-                <a:latin typeface="Arial" panose="020B0604020202020204" pitchFamily="34" charset="0"/>
-                <a:cs typeface="Arial" panose="020B0604020202020204" pitchFamily="34" charset="0"/>
-                <a:sym typeface="+mn-ea"/>
-              </a:rPr>
-              <a:t>及会话</a:t>
-            </a:r>
-            <a:endParaRPr lang="zh-CN" altLang="en-US" sz="2000" dirty="0">
+            <a:endParaRPr lang="en-US" altLang="zh-CN" sz="2000" dirty="0">
               <a:latin typeface="Arial" panose="020B0604020202020204" pitchFamily="34" charset="0"/>
               <a:cs typeface="Arial" panose="020B0604020202020204" pitchFamily="34" charset="0"/>
               <a:sym typeface="+mn-ea"/>
@@ -18754,26 +18792,7 @@
                 <a:cs typeface="微软雅黑" panose="020B0503020204020204" pitchFamily="34" charset="-122"/>
                 <a:sym typeface="+mn-ea"/>
               </a:rPr>
-              <a:t>能不能完成？尝试一下构建。</a:t>
-            </a:r>
-            <a:r>
-              <a:rPr lang="en-US" altLang="zh-CN" sz="2000" dirty="0">
-                <a:latin typeface="微软雅黑" panose="020B0503020204020204" pitchFamily="34" charset="-122"/>
-                <a:ea typeface="微软雅黑" panose="020B0503020204020204" pitchFamily="34" charset="-122"/>
-                <a:cs typeface="微软雅黑" panose="020B0503020204020204" pitchFamily="34" charset="-122"/>
-                <a:sym typeface="+mn-ea"/>
-              </a:rPr>
-              <a:t>
-</a:t>
-            </a:r>
-            <a:r>
-              <a:rPr lang="zh-CN" altLang="en-US" sz="2000" dirty="0">
-                <a:latin typeface="微软雅黑" panose="020B0503020204020204" pitchFamily="34" charset="-122"/>
-                <a:ea typeface="微软雅黑" panose="020B0503020204020204" pitchFamily="34" charset="-122"/>
-                <a:cs typeface="微软雅黑" panose="020B0503020204020204" pitchFamily="34" charset="-122"/>
-                <a:sym typeface="+mn-ea"/>
-              </a:rPr>
-              <a:t>在这个案例中，哪些问题必须交给</a:t>
+              <a:t>能不能完成？尝试一下构建。在这个案例中，哪些问题必须交给</a:t>
             </a:r>
             <a:r>
               <a:rPr lang="en-US" altLang="zh-CN" sz="2000" dirty="0">
@@ -18791,26 +18810,7 @@
                 <a:cs typeface="微软雅黑" panose="020B0503020204020204" pitchFamily="34" charset="-122"/>
                 <a:sym typeface="+mn-ea"/>
               </a:rPr>
-              <a:t>，哪些问题其实更适合交给规则和模板？</a:t>
-            </a:r>
-            <a:r>
-              <a:rPr lang="en-US" altLang="zh-CN" sz="2000" dirty="0">
-                <a:latin typeface="微软雅黑" panose="020B0503020204020204" pitchFamily="34" charset="-122"/>
-                <a:ea typeface="微软雅黑" panose="020B0503020204020204" pitchFamily="34" charset="-122"/>
-                <a:cs typeface="微软雅黑" panose="020B0503020204020204" pitchFamily="34" charset="-122"/>
-                <a:sym typeface="+mn-ea"/>
-              </a:rPr>
-              <a:t>
-</a:t>
-            </a:r>
-            <a:r>
-              <a:rPr lang="zh-CN" altLang="en-US" sz="2000" dirty="0">
-                <a:latin typeface="微软雅黑" panose="020B0503020204020204" pitchFamily="34" charset="-122"/>
-                <a:ea typeface="微软雅黑" panose="020B0503020204020204" pitchFamily="34" charset="-122"/>
-                <a:cs typeface="微软雅黑" panose="020B0503020204020204" pitchFamily="34" charset="-122"/>
-                <a:sym typeface="+mn-ea"/>
-              </a:rPr>
-              <a:t>这个案例还有哪些部分可以进一步优化？</a:t>
+              <a:t>，哪些问题其实更适合交给规则和模板？这个案例还有哪些部分可以进一步优化？</a:t>
             </a:r>
             <a:endParaRPr lang="zh-CN" altLang="en-US" sz="2000" dirty="0">
               <a:latin typeface="微软雅黑" panose="020B0503020204020204" pitchFamily="34" charset="-122"/>
@@ -18882,7 +18882,7 @@
         </p:nvSpPr>
         <p:spPr>
           <a:xfrm>
-            <a:off x="3348000" y="3924935"/>
+            <a:off x="3201950" y="3924935"/>
             <a:ext cx="5789295" cy="2376170"/>
           </a:xfrm>
           <a:prstGeom prst="rect">
@@ -18907,7 +18907,7 @@
                 <a:cs typeface="微软雅黑" panose="020B0503020204020204" pitchFamily="34" charset="-122"/>
                 <a:sym typeface="+mn-ea"/>
               </a:rPr>
-              <a:t>通过明确节点职责、变量契约和控制逻辑来设计工作流，利用</a:t>
+              <a:t>首先分析任务环节，将意图识别、槽位提取、路由判断等交给</a:t>
             </a:r>
             <a:r>
               <a:rPr lang="en-US" altLang="zh-CN" sz="2000" dirty="0">
@@ -18925,25 +18925,7 @@
                 <a:cs typeface="微软雅黑" panose="020B0503020204020204" pitchFamily="34" charset="-122"/>
                 <a:sym typeface="+mn-ea"/>
               </a:rPr>
-              <a:t>处理语义理解，用</a:t>
-            </a:r>
-            <a:r>
-              <a:rPr lang="en-US" altLang="zh-CN" sz="2000" dirty="0">
-                <a:latin typeface="微软雅黑" panose="020B0503020204020204" pitchFamily="34" charset="-122"/>
-                <a:ea typeface="微软雅黑" panose="020B0503020204020204" pitchFamily="34" charset="-122"/>
-                <a:cs typeface="微软雅黑" panose="020B0503020204020204" pitchFamily="34" charset="-122"/>
-                <a:sym typeface="+mn-ea"/>
-              </a:rPr>
-              <a:t>IF/ELSE</a:t>
-            </a:r>
-            <a:r>
-              <a:rPr lang="zh-CN" altLang="en-US" sz="2000" dirty="0">
-                <a:latin typeface="微软雅黑" panose="020B0503020204020204" pitchFamily="34" charset="-122"/>
-                <a:ea typeface="微软雅黑" panose="020B0503020204020204" pitchFamily="34" charset="-122"/>
-                <a:cs typeface="微软雅黑" panose="020B0503020204020204" pitchFamily="34" charset="-122"/>
-                <a:sym typeface="+mn-ea"/>
-              </a:rPr>
-              <a:t>等控制节点处理规则逻辑，并通过会话变量和记忆机制管理多轮对话状态。</a:t>
+              <a:t>，将规则明确的逻辑分支、变量赋值、聚合等交给控制节点和代码节点，实现职责分离。优化可从记忆管理、异常处理、多轮补槽效率等角度切入。</a:t>
             </a:r>
             <a:endParaRPr lang="zh-CN" altLang="en-US" sz="2000" dirty="0">
               <a:latin typeface="微软雅黑" panose="020B0503020204020204" pitchFamily="34" charset="-122"/>
@@ -20125,13 +20107,33 @@
               <a:rPr lang="zh-CN" altLang="zh-CN" dirty="0">
                 <a:latin typeface="微软雅黑" panose="020B0503020204020204" pitchFamily="34" charset="-122"/>
                 <a:ea typeface="微软雅黑" panose="020B0503020204020204" pitchFamily="34" charset="-122"/>
+                <a:cs typeface="微软雅黑" panose="020B0503020204020204" pitchFamily="34" charset="-122"/>
                 <a:sym typeface="+mn-ea"/>
               </a:rPr>
-              <a:t>某物流分拣中心每天处理上万件包裹，现有系统按固定流程操作。经理想引入新系统，让系统自己判断处理条码污损、易碎品等异常情况，并能根据实时车流调整分拣优先级。</a:t>
+              <a:t>某物流分拣中心每天处理上万件包裹，从卸货到装车需经过扫码、称重、分拣、复核等固定步骤，操作员只需照屏幕提示执行，这套流程已稳定运行三年。然而，经理希望引入新系统：让系统自主判断</a:t>
             </a:r>
-            <a:endParaRPr lang="zh-CN" altLang="zh-CN" dirty="0">
+            <a:r>
+              <a:rPr lang="en-US" altLang="zh-CN" dirty="0">
+                <a:latin typeface="微软雅黑" panose="020B0503020204020204" pitchFamily="34" charset="-122"/>
+                <a:ea typeface="微软雅黑" panose="020B0503020204020204" pitchFamily="34" charset="-122"/>
+                <a:cs typeface="微软雅黑" panose="020B0503020204020204" pitchFamily="34" charset="-122"/>
+                <a:sym typeface="+mn-ea"/>
+              </a:rPr>
+              <a:t>——</a:t>
+            </a:r>
+            <a:r>
+              <a:rPr lang="zh-CN" altLang="en-US" dirty="0">
+                <a:latin typeface="微软雅黑" panose="020B0503020204020204" pitchFamily="34" charset="-122"/>
+                <a:ea typeface="微软雅黑" panose="020B0503020204020204" pitchFamily="34" charset="-122"/>
+                <a:cs typeface="微软雅黑" panose="020B0503020204020204" pitchFamily="34" charset="-122"/>
+                <a:sym typeface="+mn-ea"/>
+              </a:rPr>
+              <a:t>遇到条码污损包裹，先清洁再扫码；发现疑似易碎品，自动改走缓降滑道；还能根据实时车流调整分拣优先级。这引发了与传统自动化流程的本质差异思考：新系统需要具备哪些功能才能在企业场景中稳定工作？如何用指令让系统理解并执行经理的设想？</a:t>
+            </a:r>
+            <a:endParaRPr lang="zh-CN" altLang="en-US" dirty="0">
               <a:latin typeface="微软雅黑" panose="020B0503020204020204" pitchFamily="34" charset="-122"/>
               <a:ea typeface="微软雅黑" panose="020B0503020204020204" pitchFamily="34" charset="-122"/>
+              <a:cs typeface="微软雅黑" panose="020B0503020204020204" pitchFamily="34" charset="-122"/>
               <a:sym typeface="+mn-ea"/>
             </a:endParaRPr>
           </a:p>
@@ -20198,7 +20200,7 @@
                 <a:ea typeface="微软雅黑" panose="020B0503020204020204" pitchFamily="34" charset="-122"/>
                 <a:cs typeface="微软雅黑" panose="020B0503020204020204" pitchFamily="34" charset="-122"/>
               </a:rPr>
-              <a:t>同样是自动化，工作流和智能体有什么区别？</a:t>
+              <a:t>新系统与传统工作流的核心区别是什么？</a:t>
             </a:r>
             <a:r>
               <a:rPr lang="en-US" altLang="zh-CN" sz="2000" dirty="0">
@@ -20215,7 +20217,7 @@
                 <a:ea typeface="微软雅黑" panose="020B0503020204020204" pitchFamily="34" charset="-122"/>
                 <a:cs typeface="微软雅黑" panose="020B0503020204020204" pitchFamily="34" charset="-122"/>
               </a:rPr>
-              <a:t>新系统需要具备什么功能才能在企业中稳定工作？</a:t>
+              <a:t>新系统需要具备哪些功能才能稳定工作？</a:t>
             </a:r>
             <a:r>
               <a:rPr lang="en-US" altLang="zh-CN" sz="2000" dirty="0">
@@ -20232,7 +20234,7 @@
                 <a:ea typeface="微软雅黑" panose="020B0503020204020204" pitchFamily="34" charset="-122"/>
                 <a:cs typeface="微软雅黑" panose="020B0503020204020204" pitchFamily="34" charset="-122"/>
               </a:rPr>
-              <a:t>如何用自己的话对系统下指令来实现经理的想法？</a:t>
+              <a:t>如何用你的话对系统下指令来实现经理的想法？</a:t>
             </a:r>
             <a:endParaRPr lang="zh-CN" altLang="en-US" sz="2000" dirty="0">
               <a:latin typeface="微软雅黑" panose="020B0503020204020204" pitchFamily="34" charset="-122"/>
@@ -22811,7 +22813,39 @@
                 <a:ea typeface="微软雅黑" panose="020B0503020204020204" pitchFamily="34" charset="-122"/>
                 <a:cs typeface="微软雅黑" panose="020B0503020204020204" pitchFamily="34" charset="-122"/>
               </a:rPr>
-              <a:t>）的核心差异，掌握节点组件的功能定位、变量传递方式、逻辑控制流以及多轮对话中的记忆与路由机制。</a:t>
+              <a:t>）的核心差异，掌握节点组件的功能定位、变量传递方式、逻辑控制流以及多轮对话中的记忆与路由机制。通过本章学习，学员将认识到：</a:t>
+            </a:r>
+            <a:r>
+              <a:rPr lang="en-US" altLang="zh-CN" dirty="0" smtClean="0">
+                <a:latin typeface="微软雅黑" panose="020B0503020204020204" pitchFamily="34" charset="-122"/>
+                <a:ea typeface="微软雅黑" panose="020B0503020204020204" pitchFamily="34" charset="-122"/>
+                <a:cs typeface="微软雅黑" panose="020B0503020204020204" pitchFamily="34" charset="-122"/>
+              </a:rPr>
+              <a:t>Agent </a:t>
+            </a:r>
+            <a:r>
+              <a:rPr lang="zh-CN" altLang="en-US" dirty="0" smtClean="0">
+                <a:latin typeface="微软雅黑" panose="020B0503020204020204" pitchFamily="34" charset="-122"/>
+                <a:ea typeface="微软雅黑" panose="020B0503020204020204" pitchFamily="34" charset="-122"/>
+                <a:cs typeface="微软雅黑" panose="020B0503020204020204" pitchFamily="34" charset="-122"/>
+              </a:rPr>
+              <a:t>并不是一个大</a:t>
+            </a:r>
+            <a:r>
+              <a:rPr lang="en-US" altLang="zh-CN" dirty="0" smtClean="0">
+                <a:latin typeface="微软雅黑" panose="020B0503020204020204" pitchFamily="34" charset="-122"/>
+                <a:ea typeface="微软雅黑" panose="020B0503020204020204" pitchFamily="34" charset="-122"/>
+                <a:cs typeface="微软雅黑" panose="020B0503020204020204" pitchFamily="34" charset="-122"/>
+              </a:rPr>
+              <a:t> Prompt</a:t>
+            </a:r>
+            <a:r>
+              <a:rPr lang="zh-CN" altLang="en-US" dirty="0" smtClean="0">
+                <a:latin typeface="微软雅黑" panose="020B0503020204020204" pitchFamily="34" charset="-122"/>
+                <a:ea typeface="微软雅黑" panose="020B0503020204020204" pitchFamily="34" charset="-122"/>
+                <a:cs typeface="微软雅黑" panose="020B0503020204020204" pitchFamily="34" charset="-122"/>
+              </a:rPr>
+              <a:t>，而是由输入、推理、检索、控制、记忆、输出等多个组件协同构成的执行系统。</a:t>
             </a:r>
             <a:endParaRPr lang="zh-CN" altLang="en-US" dirty="0" smtClean="0">
               <a:latin typeface="微软雅黑" panose="020B0503020204020204" pitchFamily="34" charset="-122"/>
@@ -23170,9 +23204,27 @@
                 <a:cs typeface="微软雅黑" panose="020B0503020204020204" pitchFamily="34" charset="-122"/>
                 <a:sym typeface="+mn-ea"/>
               </a:rPr>
-              <a:t>理解变量传递机制，正确引用数据</a:t>
+              <a:t>理解变量传递机制，正确使用</a:t>
             </a:r>
-            <a:endParaRPr lang="zh-CN" dirty="0">
+            <a:r>
+              <a:rPr lang="en-US" altLang="zh-CN" dirty="0">
+                <a:latin typeface="微软雅黑" panose="020B0503020204020204" pitchFamily="34" charset="-122"/>
+                <a:ea typeface="微软雅黑" panose="020B0503020204020204" pitchFamily="34" charset="-122"/>
+                <a:cs typeface="微软雅黑" panose="020B0503020204020204" pitchFamily="34" charset="-122"/>
+                <a:sym typeface="+mn-ea"/>
+              </a:rPr>
+              <a:t>{{variable}}</a:t>
+            </a:r>
+            <a:r>
+              <a:rPr lang="zh-CN" altLang="en-US" dirty="0">
+                <a:latin typeface="微软雅黑" panose="020B0503020204020204" pitchFamily="34" charset="-122"/>
+                <a:ea typeface="微软雅黑" panose="020B0503020204020204" pitchFamily="34" charset="-122"/>
+                <a:cs typeface="微软雅黑" panose="020B0503020204020204" pitchFamily="34" charset="-122"/>
+                <a:sym typeface="+mn-ea"/>
+              </a:rPr>
+              <a:t>引用数据</a:t>
+            </a:r>
+            <a:endParaRPr lang="zh-CN" altLang="en-US" dirty="0">
               <a:latin typeface="微软雅黑" panose="020B0503020204020204" pitchFamily="34" charset="-122"/>
               <a:ea typeface="微软雅黑" panose="020B0503020204020204" pitchFamily="34" charset="-122"/>
               <a:cs typeface="微软雅黑" panose="020B0503020204020204" pitchFamily="34" charset="-122"/>
@@ -23252,7 +23304,7 @@
                 <a:cs typeface="微软雅黑" panose="020B0503020204020204" pitchFamily="34" charset="-122"/>
                 <a:sym typeface="+mn-ea"/>
               </a:rPr>
-              <a:t>，理解会话记忆机制</a:t>
+              <a:t>，理解多轮对话机制</a:t>
             </a:r>
             <a:endParaRPr lang="zh-CN" altLang="en-US" dirty="0">
               <a:latin typeface="微软雅黑" panose="020B0503020204020204" pitchFamily="34" charset="-122"/>
@@ -23298,7 +23350,7 @@
                 <a:cs typeface="微软雅黑" panose="020B0503020204020204" pitchFamily="34" charset="-122"/>
                 <a:sym typeface="+mn-ea"/>
               </a:rPr>
-              <a:t>设计含意图识别、记忆与条件路由的对话工作流</a:t>
+              <a:t>设计含意图识别、澄清补槽、记忆与条件路由的对话工作流</a:t>
             </a:r>
             <a:endParaRPr lang="zh-CN" dirty="0">
               <a:latin typeface="微软雅黑" panose="020B0503020204020204" pitchFamily="34" charset="-122"/>
@@ -27014,7 +27066,7 @@
                 <a:cs typeface="Times New Roman" panose="02020603050405020304" charset="0"/>
                 <a:sym typeface="+mn-ea"/>
               </a:rPr>
-              <a:t>能评估工作流设计的节点、变量和控制逻辑合理性</a:t>
+              <a:t>从节点职责、变量契约、控制逻辑三维度评估工作流设计</a:t>
             </a:r>
             <a:endParaRPr lang="zh-CN" dirty="0" smtClean="0">
               <a:latin typeface="Arial" panose="020B0604020202020204" pitchFamily="34" charset="0"/>
@@ -27058,7 +27110,7 @@
                 <a:cs typeface="Arial" panose="020B0604020202020204" pitchFamily="34" charset="0"/>
                 <a:sym typeface="+mn-ea"/>
               </a:rPr>
-              <a:t>能从系统视角理解</a:t>
+              <a:t>从系统编排视角理解</a:t>
             </a:r>
             <a:r>
               <a:rPr lang="en-US" altLang="zh-CN" dirty="0" smtClean="0">
@@ -27074,7 +27126,7 @@
                 <a:cs typeface="Arial" panose="020B0604020202020204" pitchFamily="34" charset="0"/>
                 <a:sym typeface="+mn-ea"/>
               </a:rPr>
-              <a:t>，不将大模型视为唯一能力中心</a:t>
+              <a:t>，不视大模型为唯一能力中心</a:t>
             </a:r>
             <a:endParaRPr lang="zh-CN" altLang="en-US" dirty="0" smtClean="0">
               <a:latin typeface="Arial" panose="020B0604020202020204" pitchFamily="34" charset="0"/>
@@ -27118,7 +27170,7 @@
                 <a:cs typeface="Arial" panose="020B0604020202020204" pitchFamily="34" charset="0"/>
                 <a:sym typeface="+mn-ea"/>
               </a:rPr>
-              <a:t>能在</a:t>
+              <a:t>在</a:t>
             </a:r>
             <a:r>
               <a:rPr lang="en-US" altLang="zh-CN" dirty="0" smtClean="0">
@@ -27258,7 +27310,7 @@
                 <a:cs typeface="Times New Roman" panose="02020603050405020304" charset="0"/>
                 <a:sym typeface="+mn-ea"/>
               </a:rPr>
-              <a:t>难点：从提示词调优过渡到系统编排思维，理解变量与记忆联动</a:t>
+              <a:t>难点：从提示词调优过渡到系统编排思维，理解要素联动</a:t>
             </a:r>
             <a:endParaRPr lang="zh-CN" altLang="en-US" dirty="0" smtClean="0">
               <a:latin typeface="Arial" panose="020B0604020202020204" pitchFamily="34" charset="0"/>
